--- a/reports/BRANCH_MATARAM_PERFORMANCE_SUMMARY_20260827_INARA.pptx
+++ b/reports/BRANCH_MATARAM_PERFORMANCE_SUMMARY_20260827_INARA.pptx
@@ -12493,7 +12493,7 @@
                 </a:solidFill>
                 <a:latin typeface="Arial"/>
               </a:rPr>
-              <a:t>165</a:t>
+              <a:t>173</a:t>
             </a:r>
           </a:p>
         </p:txBody>
@@ -12528,7 +12528,7 @@
                 </a:solidFill>
                 <a:latin typeface="Arial"/>
               </a:rPr>
-              <a:t>-2,4%</a:t>
+              <a:t>-2,8%</a:t>
             </a:r>
           </a:p>
         </p:txBody>
@@ -12563,7 +12563,7 @@
                 </a:solidFill>
                 <a:latin typeface="Arial"/>
               </a:rPr>
-              <a:t>MTD-1: 169   Δ -4</a:t>
+              <a:t>MTD-1: 178   Δ -5</a:t>
             </a:r>
           </a:p>
         </p:txBody>
@@ -12680,7 +12680,7 @@
                 </a:solidFill>
                 <a:latin typeface="Arial"/>
               </a:rPr>
-              <a:t>5.114</a:t>
+              <a:t>5.450</a:t>
             </a:r>
           </a:p>
         </p:txBody>
@@ -12715,7 +12715,7 @@
                 </a:solidFill>
                 <a:latin typeface="Arial"/>
               </a:rPr>
-              <a:t>+28,3%</a:t>
+              <a:t>+24,2%</a:t>
             </a:r>
           </a:p>
         </p:txBody>
@@ -12750,7 +12750,7 @@
                 </a:solidFill>
                 <a:latin typeface="Arial"/>
               </a:rPr>
-              <a:t>MTD-1: 3.986   Δ 1.128</a:t>
+              <a:t>MTD-1: 4.387   Δ 1.063</a:t>
             </a:r>
           </a:p>
         </p:txBody>
@@ -13886,7 +13886,7 @@
                           </a:solidFill>
                           <a:latin typeface="Arial"/>
                         </a:rPr>
-                        <a:t>86</a:t>
+                        <a:t>93</a:t>
                       </a:r>
                     </a:p>
                   </a:txBody>
@@ -13933,7 +13933,7 @@
                           </a:solidFill>
                           <a:latin typeface="Arial"/>
                         </a:rPr>
-                        <a:t>84</a:t>
+                        <a:t>90</a:t>
                       </a:r>
                     </a:p>
                   </a:txBody>
@@ -13980,7 +13980,7 @@
                           </a:solidFill>
                           <a:latin typeface="Arial"/>
                         </a:rPr>
-                        <a:t>-2,3%</a:t>
+                        <a:t>-3,2%</a:t>
                       </a:r>
                     </a:p>
                   </a:txBody>
@@ -14027,7 +14027,7 @@
                           </a:solidFill>
                           <a:latin typeface="Arial"/>
                         </a:rPr>
-                        <a:t>2.033</a:t>
+                        <a:t>2.253</a:t>
                       </a:r>
                     </a:p>
                   </a:txBody>
@@ -14074,7 +14074,7 @@
                           </a:solidFill>
                           <a:latin typeface="Arial"/>
                         </a:rPr>
-                        <a:t>2.048</a:t>
+                        <a:t>2.232</a:t>
                       </a:r>
                     </a:p>
                   </a:txBody>
@@ -14117,17 +14117,17 @@
                       <a:r>
                         <a:rPr sz="1050" b="0">
                           <a:solidFill>
-                            <a:srgbClr val="137D3F"/>
-                          </a:solidFill>
-                          <a:latin typeface="Arial"/>
-                        </a:rPr>
-                        <a:t>+0,7%</a:t>
-                      </a:r>
-                    </a:p>
-                  </a:txBody>
-                  <a:tcPr marL="27432" marR="27432" marT="0" marB="0">
-                    <a:solidFill>
-                      <a:srgbClr val="E5F4EA"/>
+                            <a:srgbClr val="D73527"/>
+                          </a:solidFill>
+                          <a:latin typeface="Arial"/>
+                        </a:rPr>
+                        <a:t>-0,9%</a:t>
+                      </a:r>
+                    </a:p>
+                  </a:txBody>
+                  <a:tcPr marL="27432" marR="27432" marT="0" marB="0">
+                    <a:solidFill>
+                      <a:srgbClr val="FBE9E7"/>
                     </a:solidFill>
                     <a:lnL w="9000" cap="flat" cmpd="sng" algn="ctr">
                       <a:solidFill>
@@ -14546,6 +14546,53 @@
                           </a:solidFill>
                           <a:latin typeface="Arial"/>
                         </a:rPr>
+                        <a:t>85</a:t>
+                      </a:r>
+                    </a:p>
+                  </a:txBody>
+                  <a:tcPr marL="27432" marR="27432" marT="0" marB="0">
+                    <a:solidFill>
+                      <a:srgbClr val="FFFFFF"/>
+                    </a:solidFill>
+                    <a:lnL w="9000" cap="flat" cmpd="sng" algn="ctr">
+                      <a:solidFill>
+                        <a:srgbClr val="D8DEE7"/>
+                      </a:solidFill>
+                      <a:prstDash val="solid"/>
+                    </a:lnL>
+                    <a:lnR w="9000" cap="flat" cmpd="sng" algn="ctr">
+                      <a:solidFill>
+                        <a:srgbClr val="D8DEE7"/>
+                      </a:solidFill>
+                      <a:prstDash val="solid"/>
+                    </a:lnR>
+                    <a:lnT w="9000" cap="flat" cmpd="sng" algn="ctr">
+                      <a:solidFill>
+                        <a:srgbClr val="D8DEE7"/>
+                      </a:solidFill>
+                      <a:prstDash val="solid"/>
+                    </a:lnT>
+                    <a:lnB w="9000" cap="flat" cmpd="sng" algn="ctr">
+                      <a:solidFill>
+                        <a:srgbClr val="D8DEE7"/>
+                      </a:solidFill>
+                      <a:prstDash val="solid"/>
+                    </a:lnB>
+                  </a:tcPr>
+                </a:tc>
+                <a:tc>
+                  <a:txBody>
+                    <a:bodyPr lIns="27432" rIns="27432" tIns="0" bIns="0" anchor="ctr"/>
+                    <a:lstStyle/>
+                    <a:p>
+                      <a:pPr algn="ctr"/>
+                      <a:r>
+                        <a:rPr sz="1050" b="1">
+                          <a:solidFill>
+                            <a:srgbClr val="20252B"/>
+                          </a:solidFill>
+                          <a:latin typeface="Arial"/>
+                        </a:rPr>
                         <a:t>83</a:t>
                       </a:r>
                     </a:p>
@@ -14587,13 +14634,107 @@
                     <a:p>
                       <a:pPr algn="ctr"/>
                       <a:r>
+                        <a:rPr sz="1050" b="0">
+                          <a:solidFill>
+                            <a:srgbClr val="D73527"/>
+                          </a:solidFill>
+                          <a:latin typeface="Arial"/>
+                        </a:rPr>
+                        <a:t>-2,4%</a:t>
+                      </a:r>
+                    </a:p>
+                  </a:txBody>
+                  <a:tcPr marL="27432" marR="27432" marT="0" marB="0">
+                    <a:solidFill>
+                      <a:srgbClr val="FBE9E7"/>
+                    </a:solidFill>
+                    <a:lnL w="9000" cap="flat" cmpd="sng" algn="ctr">
+                      <a:solidFill>
+                        <a:srgbClr val="D8DEE7"/>
+                      </a:solidFill>
+                      <a:prstDash val="solid"/>
+                    </a:lnL>
+                    <a:lnR w="9000" cap="flat" cmpd="sng" algn="ctr">
+                      <a:solidFill>
+                        <a:srgbClr val="D8DEE7"/>
+                      </a:solidFill>
+                      <a:prstDash val="solid"/>
+                    </a:lnR>
+                    <a:lnT w="9000" cap="flat" cmpd="sng" algn="ctr">
+                      <a:solidFill>
+                        <a:srgbClr val="D8DEE7"/>
+                      </a:solidFill>
+                      <a:prstDash val="solid"/>
+                    </a:lnT>
+                    <a:lnB w="9000" cap="flat" cmpd="sng" algn="ctr">
+                      <a:solidFill>
+                        <a:srgbClr val="D8DEE7"/>
+                      </a:solidFill>
+                      <a:prstDash val="solid"/>
+                    </a:lnB>
+                  </a:tcPr>
+                </a:tc>
+                <a:tc>
+                  <a:txBody>
+                    <a:bodyPr lIns="27432" rIns="27432" tIns="0" bIns="0" anchor="ctr"/>
+                    <a:lstStyle/>
+                    <a:p>
+                      <a:pPr algn="ctr"/>
+                      <a:r>
+                        <a:rPr sz="1050" b="0">
+                          <a:solidFill>
+                            <a:srgbClr val="20252B"/>
+                          </a:solidFill>
+                          <a:latin typeface="Arial"/>
+                        </a:rPr>
+                        <a:t>2.134</a:t>
+                      </a:r>
+                    </a:p>
+                  </a:txBody>
+                  <a:tcPr marL="27432" marR="27432" marT="0" marB="0">
+                    <a:solidFill>
+                      <a:srgbClr val="FFFFFF"/>
+                    </a:solidFill>
+                    <a:lnL w="9000" cap="flat" cmpd="sng" algn="ctr">
+                      <a:solidFill>
+                        <a:srgbClr val="D8DEE7"/>
+                      </a:solidFill>
+                      <a:prstDash val="solid"/>
+                    </a:lnL>
+                    <a:lnR w="9000" cap="flat" cmpd="sng" algn="ctr">
+                      <a:solidFill>
+                        <a:srgbClr val="D8DEE7"/>
+                      </a:solidFill>
+                      <a:prstDash val="solid"/>
+                    </a:lnR>
+                    <a:lnT w="9000" cap="flat" cmpd="sng" algn="ctr">
+                      <a:solidFill>
+                        <a:srgbClr val="D8DEE7"/>
+                      </a:solidFill>
+                      <a:prstDash val="solid"/>
+                    </a:lnT>
+                    <a:lnB w="9000" cap="flat" cmpd="sng" algn="ctr">
+                      <a:solidFill>
+                        <a:srgbClr val="D8DEE7"/>
+                      </a:solidFill>
+                      <a:prstDash val="solid"/>
+                    </a:lnB>
+                  </a:tcPr>
+                </a:tc>
+                <a:tc>
+                  <a:txBody>
+                    <a:bodyPr lIns="27432" rIns="27432" tIns="0" bIns="0" anchor="ctr"/>
+                    <a:lstStyle/>
+                    <a:p>
+                      <a:pPr algn="ctr"/>
+                      <a:r>
                         <a:rPr sz="1050" b="1">
                           <a:solidFill>
                             <a:srgbClr val="20252B"/>
                           </a:solidFill>
                           <a:latin typeface="Arial"/>
                         </a:rPr>
-                        <a:t>81</a:t>
+                        <a:t>3.218</a:t>
                       </a:r>
                     </a:p>
                   </a:txBody>
@@ -14636,152 +14777,11 @@
                       <a:r>
                         <a:rPr sz="1050" b="0">
                           <a:solidFill>
-                            <a:srgbClr val="D73527"/>
-                          </a:solidFill>
-                          <a:latin typeface="Arial"/>
-                        </a:rPr>
-                        <a:t>-2,4%</a:t>
-                      </a:r>
-                    </a:p>
-                  </a:txBody>
-                  <a:tcPr marL="27432" marR="27432" marT="0" marB="0">
-                    <a:solidFill>
-                      <a:srgbClr val="FBE9E7"/>
-                    </a:solidFill>
-                    <a:lnL w="9000" cap="flat" cmpd="sng" algn="ctr">
-                      <a:solidFill>
-                        <a:srgbClr val="D8DEE7"/>
-                      </a:solidFill>
-                      <a:prstDash val="solid"/>
-                    </a:lnL>
-                    <a:lnR w="9000" cap="flat" cmpd="sng" algn="ctr">
-                      <a:solidFill>
-                        <a:srgbClr val="D8DEE7"/>
-                      </a:solidFill>
-                      <a:prstDash val="solid"/>
-                    </a:lnR>
-                    <a:lnT w="9000" cap="flat" cmpd="sng" algn="ctr">
-                      <a:solidFill>
-                        <a:srgbClr val="D8DEE7"/>
-                      </a:solidFill>
-                      <a:prstDash val="solid"/>
-                    </a:lnT>
-                    <a:lnB w="9000" cap="flat" cmpd="sng" algn="ctr">
-                      <a:solidFill>
-                        <a:srgbClr val="D8DEE7"/>
-                      </a:solidFill>
-                      <a:prstDash val="solid"/>
-                    </a:lnB>
-                  </a:tcPr>
-                </a:tc>
-                <a:tc>
-                  <a:txBody>
-                    <a:bodyPr lIns="27432" rIns="27432" tIns="0" bIns="0" anchor="ctr"/>
-                    <a:lstStyle/>
-                    <a:p>
-                      <a:pPr algn="ctr"/>
-                      <a:r>
-                        <a:rPr sz="1050" b="0">
-                          <a:solidFill>
-                            <a:srgbClr val="20252B"/>
-                          </a:solidFill>
-                          <a:latin typeface="Arial"/>
-                        </a:rPr>
-                        <a:t>1.953</a:t>
-                      </a:r>
-                    </a:p>
-                  </a:txBody>
-                  <a:tcPr marL="27432" marR="27432" marT="0" marB="0">
-                    <a:solidFill>
-                      <a:srgbClr val="FFFFFF"/>
-                    </a:solidFill>
-                    <a:lnL w="9000" cap="flat" cmpd="sng" algn="ctr">
-                      <a:solidFill>
-                        <a:srgbClr val="D8DEE7"/>
-                      </a:solidFill>
-                      <a:prstDash val="solid"/>
-                    </a:lnL>
-                    <a:lnR w="9000" cap="flat" cmpd="sng" algn="ctr">
-                      <a:solidFill>
-                        <a:srgbClr val="D8DEE7"/>
-                      </a:solidFill>
-                      <a:prstDash val="solid"/>
-                    </a:lnR>
-                    <a:lnT w="9000" cap="flat" cmpd="sng" algn="ctr">
-                      <a:solidFill>
-                        <a:srgbClr val="D8DEE7"/>
-                      </a:solidFill>
-                      <a:prstDash val="solid"/>
-                    </a:lnT>
-                    <a:lnB w="9000" cap="flat" cmpd="sng" algn="ctr">
-                      <a:solidFill>
-                        <a:srgbClr val="D8DEE7"/>
-                      </a:solidFill>
-                      <a:prstDash val="solid"/>
-                    </a:lnB>
-                  </a:tcPr>
-                </a:tc>
-                <a:tc>
-                  <a:txBody>
-                    <a:bodyPr lIns="27432" rIns="27432" tIns="0" bIns="0" anchor="ctr"/>
-                    <a:lstStyle/>
-                    <a:p>
-                      <a:pPr algn="ctr"/>
-                      <a:r>
-                        <a:rPr sz="1050" b="1">
-                          <a:solidFill>
-                            <a:srgbClr val="20252B"/>
-                          </a:solidFill>
-                          <a:latin typeface="Arial"/>
-                        </a:rPr>
-                        <a:t>3.066</a:t>
-                      </a:r>
-                    </a:p>
-                  </a:txBody>
-                  <a:tcPr marL="27432" marR="27432" marT="0" marB="0">
-                    <a:solidFill>
-                      <a:srgbClr val="FFFFFF"/>
-                    </a:solidFill>
-                    <a:lnL w="9000" cap="flat" cmpd="sng" algn="ctr">
-                      <a:solidFill>
-                        <a:srgbClr val="D8DEE7"/>
-                      </a:solidFill>
-                      <a:prstDash val="solid"/>
-                    </a:lnL>
-                    <a:lnR w="9000" cap="flat" cmpd="sng" algn="ctr">
-                      <a:solidFill>
-                        <a:srgbClr val="D8DEE7"/>
-                      </a:solidFill>
-                      <a:prstDash val="solid"/>
-                    </a:lnR>
-                    <a:lnT w="9000" cap="flat" cmpd="sng" algn="ctr">
-                      <a:solidFill>
-                        <a:srgbClr val="D8DEE7"/>
-                      </a:solidFill>
-                      <a:prstDash val="solid"/>
-                    </a:lnT>
-                    <a:lnB w="9000" cap="flat" cmpd="sng" algn="ctr">
-                      <a:solidFill>
-                        <a:srgbClr val="D8DEE7"/>
-                      </a:solidFill>
-                      <a:prstDash val="solid"/>
-                    </a:lnB>
-                  </a:tcPr>
-                </a:tc>
-                <a:tc>
-                  <a:txBody>
-                    <a:bodyPr lIns="27432" rIns="27432" tIns="0" bIns="0" anchor="ctr"/>
-                    <a:lstStyle/>
-                    <a:p>
-                      <a:pPr algn="ctr"/>
-                      <a:r>
-                        <a:rPr sz="1050" b="0">
-                          <a:solidFill>
                             <a:srgbClr val="137D3F"/>
                           </a:solidFill>
                           <a:latin typeface="Arial"/>
                         </a:rPr>
-                        <a:t>+57,0%</a:t>
+                        <a:t>+50,8%</a:t>
                       </a:r>
                     </a:p>
                   </a:txBody>
@@ -22871,7 +22871,7 @@
                 </a:solidFill>
                 <a:latin typeface="Arial"/>
               </a:rPr>
-              <a:t>ODP dikunjungi  451 (30,3%)</a:t>
+              <a:t>ODP dikunjungi  504 (33,9%)</a:t>
             </a:r>
           </a:p>
         </p:txBody>
@@ -22941,7 +22941,7 @@
                 </a:solidFill>
                 <a:latin typeface="Arial"/>
               </a:rPr>
-              <a:t>933</a:t>
+              <a:t>1.076</a:t>
             </a:r>
           </a:p>
         </p:txBody>
@@ -23093,7 +23093,7 @@
                 </a:solidFill>
                 <a:latin typeface="Arial"/>
               </a:rPr>
-              <a:t>ODP dikunjungi  394 (81,9%)</a:t>
+              <a:t>ODP dikunjungi  441 (91,7%)</a:t>
             </a:r>
           </a:p>
         </p:txBody>
@@ -23163,7 +23163,7 @@
                 </a:solidFill>
                 <a:latin typeface="Arial"/>
               </a:rPr>
-              <a:t>1.041</a:t>
+              <a:t>1.162</a:t>
             </a:r>
           </a:p>
         </p:txBody>
